--- a/launch/rs/design/deck-product/라라슈_상품소개서_2026.pptx
+++ b/launch/rs/design/deck-product/라라슈_상품소개서_2026.pptx
@@ -111,23 +111,23 @@
   <p:extLst>
     <p:ext uri="{521415D9-36F7-43E2-AB2F-B90AF26B5E84}">
       <p14:sectionLst xmlns:p14="http://schemas.microsoft.com/office/powerpoint/2010/main">
-        <p14:section name="표지" id="{088a51da-d355-0b66-1cc4-9073edfc0bc6}">
+        <p14:section name="표지" id="{f14ed625-58fc-22ea-e7d8-5004de70703f}">
           <p14:sldIdLst>
             <p14:sldId id="256"/>
           </p14:sldIdLst>
         </p14:section>
-        <p14:section name="브랜드" id="{124fee83-badf-e6e5-2078-280901e393b5}">
+        <p14:section name="브랜드" id="{4820f14a-e9e3-d605-f97f-e050d4648a1e}">
           <p14:sldIdLst>
             <p14:sldId id="257"/>
           </p14:sldIdLst>
         </p14:section>
-        <p14:section name="제품" id="{9fd4298e-cd35-df57-a61e-7bd13495679f}">
+        <p14:section name="제품" id="{dc76aacb-f9fc-8461-0e2b-f1d9bffb01a0}">
           <p14:sldIdLst>
             <p14:sldId id="258"/>
             <p14:sldId id="259"/>
           </p14:sldIdLst>
         </p14:section>
-        <p14:section name="런칭" id="{4e7c32ee-4791-2420-a35a-bd0c50cbbb78}">
+        <p14:section name="런칭" id="{e3a09409-2098-cf54-9b63-ac64f1d23a90}">
           <p14:sldIdLst>
             <p14:sldId id="260"/>
           </p14:sldIdLst>
@@ -712,7 +712,7 @@
           <a:p>
             <a:r>
               <a:rPr lang="en-US" dirty="0"/>
-              <a:t>기능 문구는 구조 설명만. "미끄럼 방지 보장·충격흡수·피로 감소" 표현 금지(C02 성적서 전). 컬러명은 키비주얼 기준 — 행택 품질표시(민트화이트)와 통일 필요.</a:t>
+              <a:t>기능 문구는 구조 설명만. "미끄럼 방지 보장·충격흡수·피로 감소" 표현 금지(C02 성적서 전). 컬러명 확정(10/18): 차콜 · 그레이 · 민트화이트. 키비주얼 이미지 내 라벨(차콜 블랙·민트 그린)은 수정 필요.</a:t>
             </a:r>
             <a:endParaRPr lang="en-US" dirty="0"/>
           </a:p>
@@ -3334,7 +3334,7 @@
                             <a:schemeClr val="bg1"/>
                           </a:solidFill>
                         </a:rPr>
-                        <a:t>그레이 · 차콜 블랙 · 민트 그린</a:t>
+                        <a:t>차콜 · 그레이 · 민트화이트</a:t>
                       </a:r>
                       <a:endParaRPr lang="en-US" sz="1100" dirty="0"/>
                     </a:p>

--- a/launch/rs/design/deck-product/라라슈_상품소개서_2026.pptx
+++ b/launch/rs/design/deck-product/라라슈_상품소개서_2026.pptx
@@ -111,23 +111,23 @@
   <p:extLst>
     <p:ext uri="{521415D9-36F7-43E2-AB2F-B90AF26B5E84}">
       <p14:sectionLst xmlns:p14="http://schemas.microsoft.com/office/powerpoint/2010/main">
-        <p14:section name="표지" id="{f14ed625-58fc-22ea-e7d8-5004de70703f}">
+        <p14:section name="표지" id="{193a5595-c509-3204-2e0e-b98ab2bebd17}">
           <p14:sldIdLst>
             <p14:sldId id="256"/>
           </p14:sldIdLst>
         </p14:section>
-        <p14:section name="브랜드" id="{4820f14a-e9e3-d605-f97f-e050d4648a1e}">
+        <p14:section name="브랜드" id="{0919dec5-d951-3fa5-8e86-356de22857f3}">
           <p14:sldIdLst>
             <p14:sldId id="257"/>
           </p14:sldIdLst>
         </p14:section>
-        <p14:section name="제품" id="{dc76aacb-f9fc-8461-0e2b-f1d9bffb01a0}">
+        <p14:section name="제품" id="{7588cf50-66fa-a17d-10dd-a3b6eaf1a4f9}">
           <p14:sldIdLst>
             <p14:sldId id="258"/>
             <p14:sldId id="259"/>
           </p14:sldIdLst>
         </p14:section>
-        <p14:section name="런칭" id="{e3a09409-2098-cf54-9b63-ac64f1d23a90}">
+        <p14:section name="런칭" id="{e267df35-b00e-4c79-aafa-3e88d71ee2e0}">
           <p14:sldIdLst>
             <p14:sldId id="260"/>
           </p14:sldIdLst>

--- a/launch/rs/design/deck-product/라라슈_상품소개서_2026.pptx
+++ b/launch/rs/design/deck-product/라라슈_상품소개서_2026.pptx
@@ -111,23 +111,23 @@
   <p:extLst>
     <p:ext uri="{521415D9-36F7-43E2-AB2F-B90AF26B5E84}">
       <p14:sectionLst xmlns:p14="http://schemas.microsoft.com/office/powerpoint/2010/main">
-        <p14:section name="표지" id="{193a5595-c509-3204-2e0e-b98ab2bebd17}">
+        <p14:section name="표지" id="{4cca4255-e887-f254-1e6c-829233434ee6}">
           <p14:sldIdLst>
             <p14:sldId id="256"/>
           </p14:sldIdLst>
         </p14:section>
-        <p14:section name="브랜드" id="{0919dec5-d951-3fa5-8e86-356de22857f3}">
+        <p14:section name="브랜드" id="{47a8153a-4fe0-926f-d1d8-165496292431}">
           <p14:sldIdLst>
             <p14:sldId id="257"/>
           </p14:sldIdLst>
         </p14:section>
-        <p14:section name="제품" id="{7588cf50-66fa-a17d-10dd-a3b6eaf1a4f9}">
+        <p14:section name="제품" id="{0a20cb82-5c8d-5f0b-3c03-40276d114198}">
           <p14:sldIdLst>
             <p14:sldId id="258"/>
             <p14:sldId id="259"/>
           </p14:sldIdLst>
         </p14:section>
-        <p14:section name="런칭" id="{e267df35-b00e-4c79-aafa-3e88d71ee2e0}">
+        <p14:section name="런칭" id="{46e3d011-df4d-135e-02f3-e8558fb3f2cf}">
           <p14:sldIdLst>
             <p14:sldId id="260"/>
           </p14:sldIdLst>

--- a/launch/rs/design/deck-product/라라슈_상품소개서_2026.pptx
+++ b/launch/rs/design/deck-product/라라슈_상품소개서_2026.pptx
@@ -111,23 +111,23 @@
   <p:extLst>
     <p:ext uri="{521415D9-36F7-43E2-AB2F-B90AF26B5E84}">
       <p14:sectionLst xmlns:p14="http://schemas.microsoft.com/office/powerpoint/2010/main">
-        <p14:section name="표지" id="{4cca4255-e887-f254-1e6c-829233434ee6}">
+        <p14:section name="표지" id="{4362d0c7-9976-ac85-b178-332ae8d8cc30}">
           <p14:sldIdLst>
             <p14:sldId id="256"/>
           </p14:sldIdLst>
         </p14:section>
-        <p14:section name="브랜드" id="{47a8153a-4fe0-926f-d1d8-165496292431}">
+        <p14:section name="브랜드" id="{fd7fe3e8-a1c1-3b3d-ce7e-cc73d58516a4}">
           <p14:sldIdLst>
             <p14:sldId id="257"/>
           </p14:sldIdLst>
         </p14:section>
-        <p14:section name="제품" id="{0a20cb82-5c8d-5f0b-3c03-40276d114198}">
+        <p14:section name="제품" id="{f9af7a9f-e20c-53a8-425a-3c6fa95b92fe}">
           <p14:sldIdLst>
             <p14:sldId id="258"/>
             <p14:sldId id="259"/>
           </p14:sldIdLst>
         </p14:section>
-        <p14:section name="런칭" id="{46e3d011-df4d-135e-02f3-e8558fb3f2cf}">
+        <p14:section name="런칭" id="{2a949a34-29aa-f510-2962-aa22bb4767f2}">
           <p14:sldIdLst>
             <p14:sldId id="260"/>
           </p14:sldIdLst>
@@ -2056,7 +2056,7 @@
                   <a:schemeClr val="bg1"/>
                 </a:solidFill>
               </a:rPr>
-              <a:t>서서 일하는 사람의 발에서 시작했습니다</a:t>
+              <a:t>퇴근하면 신발부터 벗게 되는 그 발을 위해</a:t>
             </a:r>
             <a:endParaRPr lang="en-US" sz="2800" dirty="0"/>
           </a:p>
@@ -2092,7 +2092,7 @@
                   <a:schemeClr val="accent6"/>
                 </a:solidFill>
               </a:rPr>
-              <a:t>하루 10시간 서서 일하는 식당 사장님들의 발 사진에서 출발한 브랜드. 바닥에 닿는 신발과, 지금 신는 신발에 더하는 인솔 두 가지로 시작합니다.</a:t>
+              <a:t>하루 7시간, 주방과 매장과 계산대 앞에 서 있는 사람들을 위한 브랜드. 출근길에도, 근무 중에도, 퇴근길에도 같은 신발로 — 사람의 발과 지구의 내일을 함께 생각합니다.</a:t>
             </a:r>
             <a:endParaRPr lang="en-US" sz="1400" dirty="0"/>
           </a:p>
@@ -2206,7 +2206,7 @@
                   <a:schemeClr val="bg1"/>
                 </a:solidFill>
               </a:rPr>
-              <a:t>현장에서 출발</a:t>
+              <a:t>출퇴근 겸용 디자인</a:t>
             </a:r>
             <a:endParaRPr lang="en-US" sz="1800" dirty="0"/>
           </a:p>
@@ -2245,7 +2245,7 @@
                   <a:schemeClr val="accent6"/>
                 </a:solidFill>
               </a:rPr>
-              <a:t>식당·주방·매장처럼 오래 서서 일하는 사람이 기준입니다. 기능보다 먼저 하루의 동선을 봤습니다.</a:t>
+              <a:t>작업화처럼 보이지 않게 — 출근길에 신고 나와 근무 중에도, 퇴근길에도 그대로 신을 수 있도록 디자인했습니다.</a:t>
             </a:r>
             <a:endParaRPr lang="en-US" sz="1200" dirty="0"/>
           </a:p>
@@ -2551,9 +2551,45 @@
                   <a:schemeClr val="accent6"/>
                 </a:solidFill>
               </a:rPr>
-              <a:t>정형외과 전문의가 패드 위치와 인솔 형태를 함께 검토했습니다. 패드 무늬는 국내 논문 2편을 참고해 설계했습니다.</a:t>
+              <a:t>정형외과 전문의 이문홍 원장의 설계 자문으로, 발이 바닥에 닿는 순서를 기준으로 4점 패드 위치를 정했습니다.</a:t>
             </a:r>
             <a:endParaRPr lang="en-US" sz="1200" dirty="0"/>
+          </a:p>
+        </p:txBody>
+      </p:sp>
+      <p:sp>
+        <p:nvSpPr>
+          <p:cNvPr id="19" name="Text 17"/>
+          <p:cNvSpPr txBox="1"/>
+          <p:nvPr/>
+        </p:nvSpPr>
+        <p:spPr>
+          <a:xfrm>
+            <a:off x="457200" y="4526280"/>
+            <a:ext cx="7863840" cy="228600"/>
+          </a:xfrm>
+          <a:prstGeom prst="rect">
+            <a:avLst/>
+          </a:prstGeom>
+          <a:noFill/>
+          <a:ln/>
+        </p:spPr>
+        <p:txBody>
+          <a:bodyPr wrap="square" lIns="0" tIns="0" rIns="0" bIns="0" rtlCol="0" anchor="t"/>
+          <a:lstStyle/>
+          <a:p>
+            <a:pPr indent="0" marL="0">
+              <a:buNone/>
+            </a:pPr>
+            <a:r>
+              <a:rPr lang="en-US" sz="900" dirty="0">
+                <a:solidFill>
+                  <a:schemeClr val="accent3"/>
+                </a:solidFill>
+              </a:rPr>
+              <a:t>이문홍 원장은 제품 설계 자문에 참여하고 자문료를 받았습니다.</a:t>
+            </a:r>
+            <a:endParaRPr lang="en-US" sz="900" dirty="0"/>
           </a:p>
         </p:txBody>
       </p:sp>
